--- a/kingOfKagoshima_UIUX.pptx
+++ b/kingOfKagoshima_UIUX.pptx
@@ -10,6 +10,7 @@
     <p:sldId id="258" r:id="rId4"/>
     <p:sldId id="259" r:id="rId5"/>
     <p:sldId id="260" r:id="rId6"/>
+    <p:sldId id="261" r:id="rId7"/>
   </p:sldIdLst>
   <p:sldSz cx="12192000" cy="6858000"/>
   <p:notesSz cx="6858000" cy="9144000"/>
@@ -108,6 +109,11 @@
       </a:defRPr>
     </a:lvl9pPr>
   </p:defaultTextStyle>
+  <p:extLst>
+    <p:ext uri="{EFAFB233-063F-42B5-8137-9DF3F51BA10A}">
+      <p15:sldGuideLst xmlns:p15="http://schemas.microsoft.com/office/powerpoint/2012/main"/>
+    </p:ext>
+  </p:extLst>
 </p:presentation>
 </file>
 
@@ -258,7 +264,7 @@
           <a:p>
             <a:fld id="{F395DBE0-DFCF-4EE2-A1D3-217ACEB0DE16}" type="datetimeFigureOut">
               <a:rPr kumimoji="1" lang="ja-JP" altLang="en-US" smtClean="0"/>
-              <a:t>2026/5/11</a:t>
+              <a:t>2026/5/12</a:t>
             </a:fld>
             <a:endParaRPr kumimoji="1" lang="ja-JP" altLang="en-US"/>
           </a:p>
@@ -488,7 +494,7 @@
           <a:p>
             <a:fld id="{F395DBE0-DFCF-4EE2-A1D3-217ACEB0DE16}" type="datetimeFigureOut">
               <a:rPr kumimoji="1" lang="ja-JP" altLang="en-US" smtClean="0"/>
-              <a:t>2026/5/11</a:t>
+              <a:t>2026/5/12</a:t>
             </a:fld>
             <a:endParaRPr kumimoji="1" lang="ja-JP" altLang="en-US"/>
           </a:p>
@@ -728,7 +734,7 @@
           <a:p>
             <a:fld id="{F395DBE0-DFCF-4EE2-A1D3-217ACEB0DE16}" type="datetimeFigureOut">
               <a:rPr kumimoji="1" lang="ja-JP" altLang="en-US" smtClean="0"/>
-              <a:t>2026/5/11</a:t>
+              <a:t>2026/5/12</a:t>
             </a:fld>
             <a:endParaRPr kumimoji="1" lang="ja-JP" altLang="en-US"/>
           </a:p>
@@ -958,7 +964,7 @@
           <a:p>
             <a:fld id="{F395DBE0-DFCF-4EE2-A1D3-217ACEB0DE16}" type="datetimeFigureOut">
               <a:rPr kumimoji="1" lang="ja-JP" altLang="en-US" smtClean="0"/>
-              <a:t>2026/5/11</a:t>
+              <a:t>2026/5/12</a:t>
             </a:fld>
             <a:endParaRPr kumimoji="1" lang="ja-JP" altLang="en-US"/>
           </a:p>
@@ -1233,7 +1239,7 @@
           <a:p>
             <a:fld id="{F395DBE0-DFCF-4EE2-A1D3-217ACEB0DE16}" type="datetimeFigureOut">
               <a:rPr kumimoji="1" lang="ja-JP" altLang="en-US" smtClean="0"/>
-              <a:t>2026/5/11</a:t>
+              <a:t>2026/5/12</a:t>
             </a:fld>
             <a:endParaRPr kumimoji="1" lang="ja-JP" altLang="en-US"/>
           </a:p>
@@ -1562,7 +1568,7 @@
           <a:p>
             <a:fld id="{F395DBE0-DFCF-4EE2-A1D3-217ACEB0DE16}" type="datetimeFigureOut">
               <a:rPr kumimoji="1" lang="ja-JP" altLang="en-US" smtClean="0"/>
-              <a:t>2026/5/11</a:t>
+              <a:t>2026/5/12</a:t>
             </a:fld>
             <a:endParaRPr kumimoji="1" lang="ja-JP" altLang="en-US"/>
           </a:p>
@@ -2038,7 +2044,7 @@
           <a:p>
             <a:fld id="{F395DBE0-DFCF-4EE2-A1D3-217ACEB0DE16}" type="datetimeFigureOut">
               <a:rPr kumimoji="1" lang="ja-JP" altLang="en-US" smtClean="0"/>
-              <a:t>2026/5/11</a:t>
+              <a:t>2026/5/12</a:t>
             </a:fld>
             <a:endParaRPr kumimoji="1" lang="ja-JP" altLang="en-US"/>
           </a:p>
@@ -2179,7 +2185,7 @@
           <a:p>
             <a:fld id="{F395DBE0-DFCF-4EE2-A1D3-217ACEB0DE16}" type="datetimeFigureOut">
               <a:rPr kumimoji="1" lang="ja-JP" altLang="en-US" smtClean="0"/>
-              <a:t>2026/5/11</a:t>
+              <a:t>2026/5/12</a:t>
             </a:fld>
             <a:endParaRPr kumimoji="1" lang="ja-JP" altLang="en-US"/>
           </a:p>
@@ -2292,7 +2298,7 @@
           <a:p>
             <a:fld id="{F395DBE0-DFCF-4EE2-A1D3-217ACEB0DE16}" type="datetimeFigureOut">
               <a:rPr kumimoji="1" lang="ja-JP" altLang="en-US" smtClean="0"/>
-              <a:t>2026/5/11</a:t>
+              <a:t>2026/5/12</a:t>
             </a:fld>
             <a:endParaRPr kumimoji="1" lang="ja-JP" altLang="en-US"/>
           </a:p>
@@ -2635,7 +2641,7 @@
           <a:p>
             <a:fld id="{F395DBE0-DFCF-4EE2-A1D3-217ACEB0DE16}" type="datetimeFigureOut">
               <a:rPr kumimoji="1" lang="ja-JP" altLang="en-US" smtClean="0"/>
-              <a:t>2026/5/11</a:t>
+              <a:t>2026/5/12</a:t>
             </a:fld>
             <a:endParaRPr kumimoji="1" lang="ja-JP" altLang="en-US"/>
           </a:p>
@@ -2923,7 +2929,7 @@
           <a:p>
             <a:fld id="{F395DBE0-DFCF-4EE2-A1D3-217ACEB0DE16}" type="datetimeFigureOut">
               <a:rPr kumimoji="1" lang="ja-JP" altLang="en-US" smtClean="0"/>
-              <a:t>2026/5/11</a:t>
+              <a:t>2026/5/12</a:t>
             </a:fld>
             <a:endParaRPr kumimoji="1" lang="ja-JP" altLang="en-US"/>
           </a:p>
@@ -3196,7 +3202,7 @@
           <a:p>
             <a:fld id="{F395DBE0-DFCF-4EE2-A1D3-217ACEB0DE16}" type="datetimeFigureOut">
               <a:rPr kumimoji="1" lang="ja-JP" altLang="en-US" smtClean="0"/>
-              <a:t>2026/5/11</a:t>
+              <a:t>2026/5/12</a:t>
             </a:fld>
             <a:endParaRPr kumimoji="1" lang="ja-JP" altLang="en-US"/>
           </a:p>
@@ -5219,6 +5225,173 @@
     <p:extLst>
       <p:ext uri="{BB962C8B-B14F-4D97-AF65-F5344CB8AC3E}">
         <p14:creationId xmlns:p14="http://schemas.microsoft.com/office/powerpoint/2010/main" val="3150616204"/>
+      </p:ext>
+    </p:extLst>
+  </p:cSld>
+  <p:clrMapOvr>
+    <a:masterClrMapping/>
+  </p:clrMapOvr>
+</p:sld>
+</file>
+
+<file path=ppt/slides/slide6.xml><?xml version="1.0" encoding="utf-8"?>
+<p:sld xmlns:a="http://schemas.openxmlformats.org/drawingml/2006/main" xmlns:r="http://schemas.openxmlformats.org/officeDocument/2006/relationships" xmlns:p="http://schemas.openxmlformats.org/presentationml/2006/main">
+  <p:cSld>
+    <p:spTree>
+      <p:nvGrpSpPr>
+        <p:cNvPr id="1" name=""/>
+        <p:cNvGrpSpPr/>
+        <p:nvPr/>
+      </p:nvGrpSpPr>
+      <p:grpSpPr>
+        <a:xfrm>
+          <a:off x="0" y="0"/>
+          <a:ext cx="0" cy="0"/>
+          <a:chOff x="0" y="0"/>
+          <a:chExt cx="0" cy="0"/>
+        </a:xfrm>
+      </p:grpSpPr>
+      <p:sp>
+        <p:nvSpPr>
+          <p:cNvPr id="2" name="テキスト ボックス 1">
+            <a:extLst>
+              <a:ext uri="{FF2B5EF4-FFF2-40B4-BE49-F238E27FC236}">
+                <a16:creationId xmlns:a16="http://schemas.microsoft.com/office/drawing/2014/main" id="{DA5E1458-23FE-399D-08F0-782689510ED2}"/>
+              </a:ext>
+            </a:extLst>
+          </p:cNvPr>
+          <p:cNvSpPr txBox="1"/>
+          <p:nvPr/>
+        </p:nvSpPr>
+        <p:spPr>
+          <a:xfrm>
+            <a:off x="2641600" y="535709"/>
+            <a:ext cx="7259782" cy="830997"/>
+          </a:xfrm>
+          <a:prstGeom prst="rect">
+            <a:avLst/>
+          </a:prstGeom>
+          <a:noFill/>
+        </p:spPr>
+        <p:txBody>
+          <a:bodyPr wrap="square" rtlCol="0">
+            <a:spAutoFit/>
+          </a:bodyPr>
+          <a:lstStyle/>
+          <a:p>
+            <a:pPr algn="ctr"/>
+            <a:r>
+              <a:rPr kumimoji="1" lang="en-US" altLang="ja-JP" sz="4800" dirty="0"/>
+              <a:t>GAME CLEAR</a:t>
+            </a:r>
+            <a:endParaRPr kumimoji="1" lang="ja-JP" altLang="en-US" sz="4800" dirty="0"/>
+          </a:p>
+        </p:txBody>
+      </p:sp>
+      <p:sp>
+        <p:nvSpPr>
+          <p:cNvPr id="5" name="テキスト ボックス 4">
+            <a:extLst>
+              <a:ext uri="{FF2B5EF4-FFF2-40B4-BE49-F238E27FC236}">
+                <a16:creationId xmlns:a16="http://schemas.microsoft.com/office/drawing/2014/main" id="{CB948DA5-2914-100D-B5A0-A295004FF7C5}"/>
+              </a:ext>
+            </a:extLst>
+          </p:cNvPr>
+          <p:cNvSpPr txBox="1"/>
+          <p:nvPr/>
+        </p:nvSpPr>
+        <p:spPr>
+          <a:xfrm>
+            <a:off x="3048000" y="2969644"/>
+            <a:ext cx="6096000" cy="923330"/>
+          </a:xfrm>
+          <a:prstGeom prst="rect">
+            <a:avLst/>
+          </a:prstGeom>
+          <a:noFill/>
+        </p:spPr>
+        <p:txBody>
+          <a:bodyPr wrap="square">
+            <a:spAutoFit/>
+          </a:bodyPr>
+          <a:lstStyle/>
+          <a:p>
+            <a:pPr algn="ctr"/>
+            <a:r>
+              <a:rPr kumimoji="1" lang="ja-JP" altLang="en-US" sz="1800" dirty="0"/>
+              <a:t>タイム　</a:t>
+            </a:r>
+            <a:r>
+              <a:rPr kumimoji="1" lang="en-US" altLang="ja-JP" sz="1800" dirty="0"/>
+              <a:t>10000</a:t>
+            </a:r>
+          </a:p>
+          <a:p>
+            <a:pPr algn="ctr"/>
+            <a:r>
+              <a:rPr lang="ja-JP" altLang="en-US" sz="1800" dirty="0"/>
+              <a:t>ジャンプ回数　</a:t>
+            </a:r>
+            <a:r>
+              <a:rPr lang="en-US" altLang="ja-JP" sz="1800" dirty="0"/>
+              <a:t>1000</a:t>
+            </a:r>
+          </a:p>
+          <a:p>
+            <a:pPr algn="ctr"/>
+            <a:r>
+              <a:rPr kumimoji="1" lang="ja-JP" altLang="en-US" sz="1800" dirty="0"/>
+              <a:t>落下回数 </a:t>
+            </a:r>
+            <a:r>
+              <a:rPr lang="en-US" altLang="ja-JP" sz="1800" dirty="0"/>
+              <a:t>1000</a:t>
+            </a:r>
+            <a:endParaRPr kumimoji="1" lang="ja-JP" altLang="en-US" sz="1800" dirty="0"/>
+          </a:p>
+        </p:txBody>
+      </p:sp>
+      <p:sp>
+        <p:nvSpPr>
+          <p:cNvPr id="7" name="テキスト ボックス 6">
+            <a:extLst>
+              <a:ext uri="{FF2B5EF4-FFF2-40B4-BE49-F238E27FC236}">
+                <a16:creationId xmlns:a16="http://schemas.microsoft.com/office/drawing/2014/main" id="{1096ECB8-8927-5A86-994C-739B172E4228}"/>
+              </a:ext>
+            </a:extLst>
+          </p:cNvPr>
+          <p:cNvSpPr txBox="1"/>
+          <p:nvPr/>
+        </p:nvSpPr>
+        <p:spPr>
+          <a:xfrm>
+            <a:off x="4345709" y="4738254"/>
+            <a:ext cx="3500581" cy="369332"/>
+          </a:xfrm>
+          <a:prstGeom prst="rect">
+            <a:avLst/>
+          </a:prstGeom>
+          <a:noFill/>
+        </p:spPr>
+        <p:txBody>
+          <a:bodyPr wrap="square" rtlCol="0">
+            <a:spAutoFit/>
+          </a:bodyPr>
+          <a:lstStyle/>
+          <a:p>
+            <a:pPr algn="ctr"/>
+            <a:r>
+              <a:rPr lang="en-US" altLang="ja-JP" dirty="0"/>
+              <a:t>Press ENTER to stage select</a:t>
+            </a:r>
+            <a:endParaRPr kumimoji="1" lang="ja-JP" altLang="en-US" dirty="0"/>
+          </a:p>
+        </p:txBody>
+      </p:sp>
+    </p:spTree>
+    <p:extLst>
+      <p:ext uri="{BB962C8B-B14F-4D97-AF65-F5344CB8AC3E}">
+        <p14:creationId xmlns:p14="http://schemas.microsoft.com/office/powerpoint/2010/main" val="3713976643"/>
       </p:ext>
     </p:extLst>
   </p:cSld>
